--- a/decks/geog-local-place/geog-local-place_ch4_map-scale.pptx
+++ b/decks/geog-local-place/geog-local-place_ch4_map-scale.pptx
@@ -127,30 +127,30 @@
   <p:extLst>
     <p:ext uri="{521415D9-36F7-43E2-AB2F-B90AF26B5E84}">
       <p14:sectionLst xmlns:p14="http://schemas.microsoft.com/office/powerpoint/2010/main">
-        <p14:section name="Opening" id="{976798eb-42cb-4a9c-5be8-d627f84fb0ae}">
+        <p14:section name="Opening" id="{a6d9143a-ae17-21c4-e3bb-04686ac62af4}">
           <p14:sldIdLst>
             <p14:sldId id="256"/>
           </p14:sldIdLst>
         </p14:section>
-        <p14:section name="Gate" id="{4e12b6d1-4782-5a3e-8a3a-ba72d2ecb3ef}">
+        <p14:section name="Gate" id="{fd7c423d-4419-953a-eabb-8e278f1f3144}">
           <p14:sldIdLst>
             <p14:sldId id="257"/>
             <p14:sldId id="258"/>
           </p14:sldIdLst>
         </p14:section>
-        <p14:section name="Pre-teach" id="{2e2cd3d5-3d91-1da4-edf3-7781a16e01ff}">
+        <p14:section name="Pre-teach" id="{884ace59-b5fd-6001-6b7c-be418c718063}">
           <p14:sldIdLst>
             <p14:sldId id="259"/>
             <p14:sldId id="260"/>
           </p14:sldIdLst>
         </p14:section>
-        <p14:section name="Read-along" id="{b33e5533-b939-27d4-96a7-f9823fb183f5}">
+        <p14:section name="Read-along" id="{9655e348-ccd5-dbf7-d6b3-2b8fd89cecd9}">
           <p14:sldIdLst>
             <p14:sldId id="261"/>
             <p14:sldId id="262"/>
           </p14:sldIdLst>
         </p14:section>
-        <p14:section name="Teach" id="{6eb3c75f-eb03-e27b-05b7-6230a05ce78d}">
+        <p14:section name="Teach" id="{747f52f5-7661-5f8f-c298-4ddd97941cbf}">
           <p14:sldIdLst>
             <p14:sldId id="263"/>
             <p14:sldId id="264"/>
@@ -161,19 +161,19 @@
             <p14:sldId id="269"/>
           </p14:sldIdLst>
         </p14:section>
-        <p14:section name="Routes" id="{45dbf6ef-ea24-5f7f-99c6-3121d58eb31c}">
+        <p14:section name="Routes" id="{90d3cfd5-de91-ceb5-30a5-6b7d06d5f550}">
           <p14:sldIdLst>
             <p14:sldId id="270"/>
             <p14:sldId id="271"/>
             <p14:sldId id="272"/>
           </p14:sldIdLst>
         </p14:section>
-        <p14:section name="Close" id="{7ff4d72c-ed90-c4bd-b51f-9f0d702f28f5}">
+        <p14:section name="Close" id="{4bbad835-1419-7eb2-a999-377001261ea5}">
           <p14:sldIdLst>
             <p14:sldId id="273"/>
           </p14:sldIdLst>
         </p14:section>
-        <p14:section name="Answers" id="{e9674902-1df6-7cbc-68ed-74df3aae4805}">
+        <p14:section name="Answers" id="{83384f8d-c756-51a6-0feb-25755e896ea5}">
           <p14:sldIdLst>
             <p14:sldId id="274"/>
             <p14:sldId id="275"/>
@@ -2351,7 +2351,7 @@
             <a:r>
               <a:rPr lang="en-US" dirty="0"/>
               <a:t>Teach — What is scale?. Say it in your own words, then check understanding with a quick question: ask a pupil from the pre-teach group first, since they met these words and ideas before the lesson. Pupils try to recall before you re-explain.
-Scale is the link between a distance on a map and its real distance on the ground. Using scale allows us to draw something that would not normally fit on paper: a whole town, a whole country, even the whole world. Every proper map tells you its scale, usually in the corner, and you must read it before you measure anything.
+Scale tells you how a distance you measure on the map stands for a distance on the ground. Because of it, a whole town, a whole country, even the whole world can be drawn small enough to fit on paper. Every proper map tells you its scale, usually in the corner, and you must read it before you measure anything.
 There are three ways to show the same scale. A stated scale says it in words and numbers: 1 cm = 2 m means one centimetre on the map is two metres on the ground. A linear scale is a bar drawn on the map and marked off, for example 0, 2, 4 m; you lay your ruler or a strip of paper against it. A ratio scale gives the same information as two numbers: 1:200 means one unit on the map is 200 of the same units on the ground, so 1 cm is 200 cm, which is 2 m. In class you completed a table turning each scale into the other two: 1 cm = 50 m is the same as 1:5 000, and 1 cm = 100 m is the same as 1:10 000.
 Worked example — model it step by step, thinking aloud: A plan has a stated scale of 1 cm = 50 m. Write it as a ratio scale. (1) A ratio scale must use the same unit on both sides, so change 50 m into centimetres. (2) 1 m = 100 cm, so 50 m = 50 × 100 = 5 000 cm. (3) So 1 cm on the map is 5 000 cm on the ground: the ratio scale is 1:5 000. (4) Check against the deck's table: 1 cm = 50 m sits in the same row as 1:5 000. Answer: 1:5 000.
 Tip: A ratio scale has no units, so both numbers must be in the same unit. Turn metres into centimetres first.</a:t>
@@ -2443,7 +2443,7 @@
             <a:r>
               <a:rPr lang="en-US" dirty="0"/>
               <a:t>Teach — What is scale?. Say it in your own words, then check understanding with a quick question: ask a pupil from the pre-teach group first, since they met these words and ideas before the lesson. Pupils try to recall before you re-explain.
-Scale is the link between a distance on a map and its real distance on the ground. Using scale allows us to draw something that would not normally fit on paper: a whole town, a whole country, even the whole world. Every proper map tells you its scale, usually in the corner, and you must read it before you measure anything.
+Scale tells you how a distance you measure on the map stands for a distance on the ground. Because of it, a whole town, a whole country, even the whole world can be drawn small enough to fit on paper. Every proper map tells you its scale, usually in the corner, and you must read it before you measure anything.
 There are three ways to show the same scale. A stated scale says it in words and numbers: 1 cm = 2 m means one centimetre on the map is two metres on the ground. A linear scale is a bar drawn on the map and marked off, for example 0, 2, 4 m; you lay your ruler or a strip of paper against it. A ratio scale gives the same information as two numbers: 1:200 means one unit on the map is 200 of the same units on the ground, so 1 cm is 200 cm, which is 2 m. In class you completed a table turning each scale into the other two: 1 cm = 50 m is the same as 1:5 000, and 1 cm = 100 m is the same as 1:10 000.
 Worked example — model it step by step, thinking aloud: A plan has a stated scale of 1 cm = 50 m. Write it as a ratio scale. (1) A ratio scale must use the same unit on both sides, so change 50 m into centimetres. (2) 1 m = 100 cm, so 50 m = 50 × 100 = 5 000 cm. (3) So 1 cm on the map is 5 000 cm on the ground: the ratio scale is 1:5 000. (4) Check against the deck's table: 1 cm = 50 m sits in the same row as 1:5 000. Answer: 1:5 000.
 Tip: A ratio scale has no units, so both numbers must be in the same unit. Turn metres into centimetres first.</a:t>
@@ -17523,7 +17523,7 @@
                 <a:ea typeface="Calibri" pitchFamily="34" charset="-122"/>
                 <a:cs typeface="Calibri" pitchFamily="34" charset="-120"/>
               </a:rPr>
-              <a:t>Scale is the link between a distance on a map and its real distance on the ground.</a:t>
+              <a:t>Scale tells you how a distance you measure on the map stands for a distance on the ground.</a:t>
             </a:r>
             <a:endParaRPr lang="en-US" sz="2400" dirty="0"/>
           </a:p>
